--- a/kvcache/unified_kv_memory/提前验证方案设计/验证计划方案设计/开发人员串讲PPT/统一异构KVCache存储池_前三周人力与任务安排架构图.pptx
+++ b/kvcache/unified_kv_memory/提前验证方案设计/验证计划方案设计/开发人员串讲PPT/统一异构KVCache存储池_前三周人力与任务安排架构图.pptx
@@ -3195,11 +3195,11 @@
             <a:avLst/>
           </a:prstGeom>
           <a:solidFill>
-            <a:srgbClr val="0F172A"/>
-          </a:solidFill>
-          <a:ln w="15240">
+            <a:srgbClr val="FFFFFF"/>
+          </a:solidFill>
+          <a:ln w="16510">
             <a:solidFill>
-              <a:srgbClr val="334155"/>
+              <a:srgbClr val="64748B"/>
             </a:solidFill>
           </a:ln>
         </p:spPr>
@@ -3225,7 +3225,7 @@
             <a:r>
               <a:rPr sz="1050" b="1">
                 <a:solidFill>
-                  <a:srgbClr val="FFFFFF"/>
+                  <a:srgbClr val="0F172A"/>
                 </a:solidFill>
                 <a:latin typeface="微软雅黑"/>
               </a:rPr>
@@ -3238,7 +3238,7 @@
             <a:r>
               <a:rPr sz="750">
                 <a:solidFill>
-                  <a:srgbClr val="94A3B8"/>
+                  <a:srgbClr val="64748B"/>
                 </a:solidFill>
                 <a:latin typeface="微软雅黑"/>
               </a:rPr>
@@ -3250,7 +3250,7 @@
             <a:r>
               <a:rPr sz="720" b="1">
                 <a:solidFill>
-                  <a:srgbClr val="FED7AA"/>
+                  <a:srgbClr val="C2410C"/>
                 </a:solidFill>
                 <a:latin typeface="微软雅黑"/>
               </a:rPr>
